--- a/slides/computerScience_day2.pptx
+++ b/slides/computerScience_day2.pptx
@@ -216,7 +216,7 @@
           <a:p>
             <a:fld id="{29743A7E-303A-4EAA-864C-611EED392E65}" type="datetimeFigureOut">
               <a:rPr kumimoji="1" lang="ja-JP" altLang="en-US" smtClean="0"/>
-              <a:t>2025/4/21</a:t>
+              <a:t>2025/4/22</a:t>
             </a:fld>
             <a:endParaRPr kumimoji="1" lang="ja-JP" altLang="en-US"/>
           </a:p>

--- a/slides/computerScience_day2.pptx
+++ b/slides/computerScience_day2.pptx
@@ -134,6 +134,51 @@
 </p:presentation>
 </file>
 
+<file path=ppt/revisionInfo.xml><?xml version="1.0" encoding="utf-8"?>
+<p1510:revInfo xmlns:a="http://schemas.openxmlformats.org/drawingml/2006/main" xmlns:r="http://schemas.openxmlformats.org/officeDocument/2006/relationships" xmlns:p1510="http://schemas.microsoft.com/office/powerpoint/2015/10/main">
+  <p1510:revLst>
+    <p1510:client id="{CF86DF63-918A-4893-9824-94EC1D2D3DE4}" v="1" dt="2026-04-22T05:09:46.717"/>
+  </p1510:revLst>
+</p1510:revInfo>
+</file>
+
+<file path=ppt/changesInfos/changesInfo1.xml><?xml version="1.0" encoding="utf-8"?>
+<pc:chgInfo xmlns:a="http://schemas.openxmlformats.org/drawingml/2006/main" xmlns:r="http://schemas.openxmlformats.org/officeDocument/2006/relationships" xmlns:ac="http://schemas.microsoft.com/office/drawing/2013/main/command" xmlns:pc="http://schemas.microsoft.com/office/powerpoint/2013/main/command">
+  <pc:docChgLst>
+    <pc:chgData name="昌平 横山" userId="95af401ee25f10bb" providerId="LiveId" clId="{57C5AE1E-E27A-4F8E-BD82-BCF3DAF0017F}"/>
+    <pc:docChg chg="modSld">
+      <pc:chgData name="昌平 横山" userId="95af401ee25f10bb" providerId="LiveId" clId="{57C5AE1E-E27A-4F8E-BD82-BCF3DAF0017F}" dt="2026-04-22T05:09:46.717" v="13"/>
+      <pc:docMkLst>
+        <pc:docMk/>
+      </pc:docMkLst>
+      <pc:sldChg chg="modSp mod">
+        <pc:chgData name="昌平 横山" userId="95af401ee25f10bb" providerId="LiveId" clId="{57C5AE1E-E27A-4F8E-BD82-BCF3DAF0017F}" dt="2026-04-22T05:09:46.717" v="13"/>
+        <pc:sldMkLst>
+          <pc:docMk/>
+          <pc:sldMk cId="2614396686" sldId="256"/>
+        </pc:sldMkLst>
+        <pc:spChg chg="mod">
+          <ac:chgData name="昌平 横山" userId="95af401ee25f10bb" providerId="LiveId" clId="{57C5AE1E-E27A-4F8E-BD82-BCF3DAF0017F}" dt="2026-04-22T05:09:43.514" v="12" actId="20577"/>
+          <ac:spMkLst>
+            <pc:docMk/>
+            <pc:sldMk cId="2614396686" sldId="256"/>
+            <ac:spMk id="2" creationId="{79DFE74A-92E8-4E4E-AF1C-A28EB01DDFB7}"/>
+          </ac:spMkLst>
+        </pc:spChg>
+        <pc:spChg chg="mod">
+          <ac:chgData name="昌平 横山" userId="95af401ee25f10bb" providerId="LiveId" clId="{57C5AE1E-E27A-4F8E-BD82-BCF3DAF0017F}" dt="2026-04-22T05:09:46.717" v="13"/>
+          <ac:spMkLst>
+            <pc:docMk/>
+            <pc:sldMk cId="2614396686" sldId="256"/>
+            <ac:spMk id="4" creationId="{74E7356E-CCD3-482D-B0A7-45E57E7C835B}"/>
+          </ac:spMkLst>
+        </pc:spChg>
+      </pc:sldChg>
+    </pc:docChg>
+  </pc:docChgLst>
+</pc:chgInfo>
+</file>
+
 <file path=ppt/notesMasters/notesMaster1.xml><?xml version="1.0" encoding="utf-8"?>
 <p:notesMaster xmlns:a="http://schemas.openxmlformats.org/drawingml/2006/main" xmlns:r="http://schemas.openxmlformats.org/officeDocument/2006/relationships" xmlns:p="http://schemas.openxmlformats.org/presentationml/2006/main">
   <p:cSld>
@@ -216,7 +261,7 @@
           <a:p>
             <a:fld id="{29743A7E-303A-4EAA-864C-611EED392E65}" type="datetimeFigureOut">
               <a:rPr kumimoji="1" lang="ja-JP" altLang="en-US" smtClean="0"/>
-              <a:t>2025/4/22</a:t>
+              <a:t>2026/4/22</a:t>
             </a:fld>
             <a:endParaRPr kumimoji="1" lang="ja-JP" altLang="en-US"/>
           </a:p>
@@ -1052,13 +1097,13 @@
           <p:nvPr/>
         </p:nvPicPr>
         <p:blipFill>
-          <a:blip r:embed="rId2">
+          <a:blip>
             <a:extLst>
               <a:ext uri="{28A0092B-C50C-407E-A947-70E740481C1C}">
                 <a14:useLocalDpi xmlns:a14="http://schemas.microsoft.com/office/drawing/2010/main" val="0"/>
               </a:ext>
               <a:ext uri="{96DAC541-7B7A-43D3-8B79-37D633B846F1}">
-                <asvg:svgBlip xmlns:asvg="http://schemas.microsoft.com/office/drawing/2016/SVG/main" r:embed="rId3"/>
+                <asvg:svgBlip xmlns:asvg="http://schemas.microsoft.com/office/drawing/2016/SVG/main" r:embed="rId2"/>
               </a:ext>
             </a:extLst>
           </a:blip>
@@ -1091,13 +1136,13 @@
           <p:nvPr/>
         </p:nvPicPr>
         <p:blipFill>
-          <a:blip r:embed="rId4">
+          <a:blip>
             <a:extLst>
               <a:ext uri="{28A0092B-C50C-407E-A947-70E740481C1C}">
                 <a14:useLocalDpi xmlns:a14="http://schemas.microsoft.com/office/drawing/2010/main" val="0"/>
               </a:ext>
               <a:ext uri="{96DAC541-7B7A-43D3-8B79-37D633B846F1}">
-                <asvg:svgBlip xmlns:asvg="http://schemas.microsoft.com/office/drawing/2016/SVG/main" r:embed="rId5"/>
+                <asvg:svgBlip xmlns:asvg="http://schemas.microsoft.com/office/drawing/2016/SVG/main" r:embed="rId3"/>
               </a:ext>
             </a:extLst>
           </a:blip>
@@ -1230,13 +1275,13 @@
           <p:nvPr userDrawn="1"/>
         </p:nvPicPr>
         <p:blipFill>
-          <a:blip r:embed="rId6">
+          <a:blip>
             <a:extLst>
               <a:ext uri="{28A0092B-C50C-407E-A947-70E740481C1C}">
                 <a14:useLocalDpi xmlns:a14="http://schemas.microsoft.com/office/drawing/2010/main" val="0"/>
               </a:ext>
               <a:ext uri="{96DAC541-7B7A-43D3-8B79-37D633B846F1}">
-                <asvg:svgBlip xmlns:asvg="http://schemas.microsoft.com/office/drawing/2016/SVG/main" r:embed="rId7"/>
+                <asvg:svgBlip xmlns:asvg="http://schemas.microsoft.com/office/drawing/2016/SVG/main" r:embed="rId4"/>
               </a:ext>
             </a:extLst>
           </a:blip>
@@ -1269,13 +1314,13 @@
           <p:nvPr userDrawn="1"/>
         </p:nvPicPr>
         <p:blipFill>
-          <a:blip r:embed="rId8">
+          <a:blip>
             <a:extLst>
               <a:ext uri="{28A0092B-C50C-407E-A947-70E740481C1C}">
                 <a14:useLocalDpi xmlns:a14="http://schemas.microsoft.com/office/drawing/2010/main" val="0"/>
               </a:ext>
               <a:ext uri="{96DAC541-7B7A-43D3-8B79-37D633B846F1}">
-                <asvg:svgBlip xmlns:asvg="http://schemas.microsoft.com/office/drawing/2016/SVG/main" r:embed="rId9"/>
+                <asvg:svgBlip xmlns:asvg="http://schemas.microsoft.com/office/drawing/2016/SVG/main" r:embed="rId5"/>
               </a:ext>
             </a:extLst>
           </a:blip>
@@ -2153,13 +2198,13 @@
           <p:nvPr userDrawn="1"/>
         </p:nvPicPr>
         <p:blipFill>
-          <a:blip r:embed="rId2">
+          <a:blip>
             <a:extLst>
               <a:ext uri="{28A0092B-C50C-407E-A947-70E740481C1C}">
                 <a14:useLocalDpi xmlns:a14="http://schemas.microsoft.com/office/drawing/2010/main" val="0"/>
               </a:ext>
               <a:ext uri="{96DAC541-7B7A-43D3-8B79-37D633B846F1}">
-                <asvg:svgBlip xmlns:asvg="http://schemas.microsoft.com/office/drawing/2016/SVG/main" r:embed="rId3"/>
+                <asvg:svgBlip xmlns:asvg="http://schemas.microsoft.com/office/drawing/2016/SVG/main" r:embed="rId2"/>
               </a:ext>
             </a:extLst>
           </a:blip>
@@ -2192,13 +2237,13 @@
           <p:nvPr userDrawn="1"/>
         </p:nvPicPr>
         <p:blipFill>
-          <a:blip r:embed="rId4">
+          <a:blip>
             <a:extLst>
               <a:ext uri="{28A0092B-C50C-407E-A947-70E740481C1C}">
                 <a14:useLocalDpi xmlns:a14="http://schemas.microsoft.com/office/drawing/2010/main" val="0"/>
               </a:ext>
               <a:ext uri="{96DAC541-7B7A-43D3-8B79-37D633B846F1}">
-                <asvg:svgBlip xmlns:asvg="http://schemas.microsoft.com/office/drawing/2016/SVG/main" r:embed="rId5"/>
+                <asvg:svgBlip xmlns:asvg="http://schemas.microsoft.com/office/drawing/2016/SVG/main" r:embed="rId3"/>
               </a:ext>
             </a:extLst>
           </a:blip>
@@ -5529,8 +5574,13 @@
             </a:br>
             <a:r>
               <a:rPr kumimoji="1" lang="ja-JP" altLang="en-US" dirty="0"/>
-              <a:t>科学Ｃ</a:t>
-            </a:r>
+              <a:t>科学</a:t>
+            </a:r>
+            <a:r>
+              <a:rPr lang="ja-JP" altLang="en-US" dirty="0"/>
+              <a:t>ｅ</a:t>
+            </a:r>
+            <a:endParaRPr kumimoji="1" lang="ja-JP" altLang="en-US" dirty="0"/>
           </a:p>
         </p:txBody>
       </p:sp>
@@ -5589,7 +5639,11 @@
           <a:p>
             <a:r>
               <a:rPr kumimoji="1" lang="en-US" altLang="ja-JP" sz="1550" dirty="0"/>
-              <a:t>Computer Science C</a:t>
+              <a:t>Computer Science</a:t>
+            </a:r>
+            <a:r>
+              <a:rPr lang="ja-JP" altLang="en-US" sz="1600" dirty="0"/>
+              <a:t>ｅ</a:t>
             </a:r>
             <a:endParaRPr kumimoji="1" lang="ja-JP" altLang="en-US" sz="1550" dirty="0"/>
           </a:p>
@@ -15726,10 +15780,10 @@
             <a:pPr marL="285750" indent="-285750">
               <a:buSzPct val="130000"/>
               <a:buBlip>
-                <a:blip r:embed="rId2">
+                <a:blip>
                   <a:extLst>
                     <a:ext uri="{96DAC541-7B7A-43D3-8B79-37D633B846F1}">
-                      <asvg:svgBlip xmlns:asvg="http://schemas.microsoft.com/office/drawing/2016/SVG/main" r:embed="rId3"/>
+                      <asvg:svgBlip xmlns:asvg="http://schemas.microsoft.com/office/drawing/2016/SVG/main" r:embed="rId2"/>
                     </a:ext>
                   </a:extLst>
                 </a:blip>
@@ -15745,10 +15799,10 @@
             <a:pPr marL="285750" indent="-285750">
               <a:buSzPct val="130000"/>
               <a:buBlip>
-                <a:blip r:embed="rId2">
+                <a:blip>
                   <a:extLst>
                     <a:ext uri="{96DAC541-7B7A-43D3-8B79-37D633B846F1}">
-                      <asvg:svgBlip xmlns:asvg="http://schemas.microsoft.com/office/drawing/2016/SVG/main" r:embed="rId3"/>
+                      <asvg:svgBlip xmlns:asvg="http://schemas.microsoft.com/office/drawing/2016/SVG/main" r:embed="rId2"/>
                     </a:ext>
                   </a:extLst>
                 </a:blip>
